--- a/TEMPLATE-slides.pptx
+++ b/TEMPLATE-slides.pptx
@@ -244,7 +244,7 @@
           <a:p>
             <a:fld id="{E759A0DE-F190-5444-87AC-4719D5F20D15}" type="datetimeFigureOut">
               <a:rPr lang="en-US" smtClean="0"/>
-              <a:t>8/8/26</a:t>
+              <a:t>9/12/26</a:t>
             </a:fld>
             <a:endParaRPr lang="en-US"/>
           </a:p>
@@ -414,7 +414,7 @@
           <a:p>
             <a:fld id="{E759A0DE-F190-5444-87AC-4719D5F20D15}" type="datetimeFigureOut">
               <a:rPr lang="en-US" smtClean="0"/>
-              <a:t>8/8/26</a:t>
+              <a:t>9/12/26</a:t>
             </a:fld>
             <a:endParaRPr lang="en-US"/>
           </a:p>
@@ -594,7 +594,7 @@
           <a:p>
             <a:fld id="{E759A0DE-F190-5444-87AC-4719D5F20D15}" type="datetimeFigureOut">
               <a:rPr lang="en-US" smtClean="0"/>
-              <a:t>8/8/26</a:t>
+              <a:t>9/12/26</a:t>
             </a:fld>
             <a:endParaRPr lang="en-US"/>
           </a:p>
@@ -764,7 +764,7 @@
           <a:p>
             <a:fld id="{E759A0DE-F190-5444-87AC-4719D5F20D15}" type="datetimeFigureOut">
               <a:rPr lang="en-US" smtClean="0"/>
-              <a:t>8/8/26</a:t>
+              <a:t>9/12/26</a:t>
             </a:fld>
             <a:endParaRPr lang="en-US"/>
           </a:p>
@@ -1010,7 +1010,7 @@
           <a:p>
             <a:fld id="{E759A0DE-F190-5444-87AC-4719D5F20D15}" type="datetimeFigureOut">
               <a:rPr lang="en-US" smtClean="0"/>
-              <a:t>8/8/26</a:t>
+              <a:t>9/12/26</a:t>
             </a:fld>
             <a:endParaRPr lang="en-US"/>
           </a:p>
@@ -1242,7 +1242,7 @@
           <a:p>
             <a:fld id="{E759A0DE-F190-5444-87AC-4719D5F20D15}" type="datetimeFigureOut">
               <a:rPr lang="en-US" smtClean="0"/>
-              <a:t>8/8/26</a:t>
+              <a:t>9/12/26</a:t>
             </a:fld>
             <a:endParaRPr lang="en-US"/>
           </a:p>
@@ -1609,7 +1609,7 @@
           <a:p>
             <a:fld id="{E759A0DE-F190-5444-87AC-4719D5F20D15}" type="datetimeFigureOut">
               <a:rPr lang="en-US" smtClean="0"/>
-              <a:t>8/8/26</a:t>
+              <a:t>9/12/26</a:t>
             </a:fld>
             <a:endParaRPr lang="en-US"/>
           </a:p>
@@ -1727,7 +1727,7 @@
           <a:p>
             <a:fld id="{E759A0DE-F190-5444-87AC-4719D5F20D15}" type="datetimeFigureOut">
               <a:rPr lang="en-US" smtClean="0"/>
-              <a:t>8/8/26</a:t>
+              <a:t>9/12/26</a:t>
             </a:fld>
             <a:endParaRPr lang="en-US"/>
           </a:p>
@@ -1822,7 +1822,7 @@
           <a:p>
             <a:fld id="{E759A0DE-F190-5444-87AC-4719D5F20D15}" type="datetimeFigureOut">
               <a:rPr lang="en-US" smtClean="0"/>
-              <a:t>8/8/26</a:t>
+              <a:t>9/12/26</a:t>
             </a:fld>
             <a:endParaRPr lang="en-US"/>
           </a:p>
@@ -2099,7 +2099,7 @@
           <a:p>
             <a:fld id="{E759A0DE-F190-5444-87AC-4719D5F20D15}" type="datetimeFigureOut">
               <a:rPr lang="en-US" smtClean="0"/>
-              <a:t>8/8/26</a:t>
+              <a:t>9/12/26</a:t>
             </a:fld>
             <a:endParaRPr lang="en-US"/>
           </a:p>
@@ -2356,7 +2356,7 @@
           <a:p>
             <a:fld id="{E759A0DE-F190-5444-87AC-4719D5F20D15}" type="datetimeFigureOut">
               <a:rPr lang="en-US" smtClean="0"/>
-              <a:t>8/8/26</a:t>
+              <a:t>9/12/26</a:t>
             </a:fld>
             <a:endParaRPr lang="en-US"/>
           </a:p>
@@ -2569,7 +2569,7 @@
           <a:p>
             <a:fld id="{E759A0DE-F190-5444-87AC-4719D5F20D15}" type="datetimeFigureOut">
               <a:rPr lang="en-US" smtClean="0"/>
-              <a:t>8/8/26</a:t>
+              <a:t>9/12/26</a:t>
             </a:fld>
             <a:endParaRPr lang="en-US"/>
           </a:p>
@@ -3065,7 +3065,23 @@
                   <a:schemeClr val="bg1"/>
                 </a:solidFill>
               </a:rPr>
-              <a:t>Words &amp; Musci Matt Boswell and Matt Papa in (2016)</a:t>
+              <a:t>Words </a:t>
+            </a:r>
+            <a:r>
+              <a:rPr lang="en-US">
+                <a:solidFill>
+                  <a:schemeClr val="bg1"/>
+                </a:solidFill>
+              </a:rPr>
+              <a:t>&amp; Music </a:t>
+            </a:r>
+            <a:r>
+              <a:rPr lang="en-US" dirty="0">
+                <a:solidFill>
+                  <a:schemeClr val="bg1"/>
+                </a:solidFill>
+              </a:rPr>
+              <a:t>Matt Boswell and Matt Papa in (2016)</a:t>
             </a:r>
           </a:p>
           <a:p>

--- a/TEMPLATE-slides.pptx
+++ b/TEMPLATE-slides.pptx
@@ -244,7 +244,7 @@
           <a:p>
             <a:fld id="{E759A0DE-F190-5444-87AC-4719D5F20D15}" type="datetimeFigureOut">
               <a:rPr lang="en-US" smtClean="0"/>
-              <a:t>9/12/26</a:t>
+              <a:t>10/28/26</a:t>
             </a:fld>
             <a:endParaRPr lang="en-US"/>
           </a:p>
@@ -414,7 +414,7 @@
           <a:p>
             <a:fld id="{E759A0DE-F190-5444-87AC-4719D5F20D15}" type="datetimeFigureOut">
               <a:rPr lang="en-US" smtClean="0"/>
-              <a:t>9/12/26</a:t>
+              <a:t>10/28/26</a:t>
             </a:fld>
             <a:endParaRPr lang="en-US"/>
           </a:p>
@@ -594,7 +594,7 @@
           <a:p>
             <a:fld id="{E759A0DE-F190-5444-87AC-4719D5F20D15}" type="datetimeFigureOut">
               <a:rPr lang="en-US" smtClean="0"/>
-              <a:t>9/12/26</a:t>
+              <a:t>10/28/26</a:t>
             </a:fld>
             <a:endParaRPr lang="en-US"/>
           </a:p>
@@ -764,7 +764,7 @@
           <a:p>
             <a:fld id="{E759A0DE-F190-5444-87AC-4719D5F20D15}" type="datetimeFigureOut">
               <a:rPr lang="en-US" smtClean="0"/>
-              <a:t>9/12/26</a:t>
+              <a:t>10/28/26</a:t>
             </a:fld>
             <a:endParaRPr lang="en-US"/>
           </a:p>
@@ -1010,7 +1010,7 @@
           <a:p>
             <a:fld id="{E759A0DE-F190-5444-87AC-4719D5F20D15}" type="datetimeFigureOut">
               <a:rPr lang="en-US" smtClean="0"/>
-              <a:t>9/12/26</a:t>
+              <a:t>10/28/26</a:t>
             </a:fld>
             <a:endParaRPr lang="en-US"/>
           </a:p>
@@ -1242,7 +1242,7 @@
           <a:p>
             <a:fld id="{E759A0DE-F190-5444-87AC-4719D5F20D15}" type="datetimeFigureOut">
               <a:rPr lang="en-US" smtClean="0"/>
-              <a:t>9/12/26</a:t>
+              <a:t>10/28/26</a:t>
             </a:fld>
             <a:endParaRPr lang="en-US"/>
           </a:p>
@@ -1609,7 +1609,7 @@
           <a:p>
             <a:fld id="{E759A0DE-F190-5444-87AC-4719D5F20D15}" type="datetimeFigureOut">
               <a:rPr lang="en-US" smtClean="0"/>
-              <a:t>9/12/26</a:t>
+              <a:t>10/28/26</a:t>
             </a:fld>
             <a:endParaRPr lang="en-US"/>
           </a:p>
@@ -1727,7 +1727,7 @@
           <a:p>
             <a:fld id="{E759A0DE-F190-5444-87AC-4719D5F20D15}" type="datetimeFigureOut">
               <a:rPr lang="en-US" smtClean="0"/>
-              <a:t>9/12/26</a:t>
+              <a:t>10/28/26</a:t>
             </a:fld>
             <a:endParaRPr lang="en-US"/>
           </a:p>
@@ -1822,7 +1822,7 @@
           <a:p>
             <a:fld id="{E759A0DE-F190-5444-87AC-4719D5F20D15}" type="datetimeFigureOut">
               <a:rPr lang="en-US" smtClean="0"/>
-              <a:t>9/12/26</a:t>
+              <a:t>10/28/26</a:t>
             </a:fld>
             <a:endParaRPr lang="en-US"/>
           </a:p>
@@ -2099,7 +2099,7 @@
           <a:p>
             <a:fld id="{E759A0DE-F190-5444-87AC-4719D5F20D15}" type="datetimeFigureOut">
               <a:rPr lang="en-US" smtClean="0"/>
-              <a:t>9/12/26</a:t>
+              <a:t>10/28/26</a:t>
             </a:fld>
             <a:endParaRPr lang="en-US"/>
           </a:p>
@@ -2356,7 +2356,7 @@
           <a:p>
             <a:fld id="{E759A0DE-F190-5444-87AC-4719D5F20D15}" type="datetimeFigureOut">
               <a:rPr lang="en-US" smtClean="0"/>
-              <a:t>9/12/26</a:t>
+              <a:t>10/28/26</a:t>
             </a:fld>
             <a:endParaRPr lang="en-US"/>
           </a:p>
@@ -2569,7 +2569,7 @@
           <a:p>
             <a:fld id="{E759A0DE-F190-5444-87AC-4719D5F20D15}" type="datetimeFigureOut">
               <a:rPr lang="en-US" smtClean="0"/>
-              <a:t>9/12/26</a:t>
+              <a:t>10/28/26</a:t>
             </a:fld>
             <a:endParaRPr lang="en-US"/>
           </a:p>
@@ -3025,7 +3025,7 @@
                 <a:latin typeface="Avenir Medium" panose="02000503020000020003" pitchFamily="2" charset="0"/>
                 <a:ea typeface="Bodoni Ornaments" pitchFamily="2" charset="0"/>
               </a:rPr>
-              <a:t>SONG TITLE</a:t>
+              <a:t>Yet Not I but Through Christ in Me</a:t>
             </a:r>
           </a:p>
         </p:txBody>
@@ -3045,7 +3045,7 @@
         <p:spPr>
           <a:xfrm>
             <a:off x="168442" y="5444311"/>
-            <a:ext cx="8807115" cy="1200329"/>
+            <a:ext cx="8807115" cy="923330"/>
           </a:xfrm>
           <a:prstGeom prst="rect">
             <a:avLst/>
@@ -3065,15 +3065,15 @@
                   <a:schemeClr val="bg1"/>
                 </a:solidFill>
               </a:rPr>
-              <a:t>Words </a:t>
-            </a:r>
-            <a:r>
-              <a:rPr lang="en-US">
+              <a:t>Words &amp; Music by Jonny Robinson Michael </a:t>
+            </a:r>
+            <a:r>
+              <a:rPr lang="en-US" dirty="0" err="1">
                 <a:solidFill>
                   <a:schemeClr val="bg1"/>
                 </a:solidFill>
               </a:rPr>
-              <a:t>&amp; Music </a:t>
+              <a:t>FarrenRich</a:t>
             </a:r>
             <a:r>
               <a:rPr lang="en-US" dirty="0">
@@ -3081,7 +3081,7 @@
                   <a:schemeClr val="bg1"/>
                 </a:solidFill>
               </a:rPr>
-              <a:t>Matt Boswell and Matt Papa in (2016)</a:t>
+              <a:t> Thompson (2019)</a:t>
             </a:r>
           </a:p>
           <a:p>
@@ -3092,7 +3092,23 @@
                   <a:schemeClr val="bg1"/>
                 </a:solidFill>
               </a:rPr>
-              <a:t>© Messenger Hymns and Love Your Enemies Publishing (Administered by Music Services, Inc.)</a:t>
+              <a:t>© 2018 </a:t>
+            </a:r>
+            <a:r>
+              <a:rPr lang="en-US" dirty="0" err="1">
+                <a:solidFill>
+                  <a:schemeClr val="bg1"/>
+                </a:solidFill>
+              </a:rPr>
+              <a:t>CityAlight</a:t>
+            </a:r>
+            <a:r>
+              <a:rPr lang="en-US" dirty="0">
+                <a:solidFill>
+                  <a:schemeClr val="bg1"/>
+                </a:solidFill>
+              </a:rPr>
+              <a:t> Music; Farren Love And War Publishing; Integrity's Alleluia! Music</a:t>
             </a:r>
           </a:p>
           <a:p>
@@ -3180,7 +3196,7 @@
           </a:bodyPr>
           <a:lstStyle/>
           <a:p>
-            <a:endParaRPr lang="en-US" sz="4000" dirty="0">
+            <a:endParaRPr lang="en-US" sz="5400" dirty="0">
               <a:solidFill>
                 <a:schemeClr val="bg1"/>
               </a:solidFill>
@@ -3189,7 +3205,31 @@
             </a:endParaRPr>
           </a:p>
           <a:p>
-            <a:endParaRPr lang="en-US" sz="4000" dirty="0">
+            <a:r>
+              <a:rPr lang="en-US" sz="5400" dirty="0">
+                <a:solidFill>
+                  <a:schemeClr val="bg1"/>
+                </a:solidFill>
+                <a:latin typeface="Avenir Medium" panose="02000503020000020003" pitchFamily="2" charset="0"/>
+                <a:ea typeface="Bodoni Ornaments" pitchFamily="2" charset="0"/>
+              </a:rPr>
+              <a:t>What gift of grace is </a:t>
+            </a:r>
+          </a:p>
+          <a:p>
+            <a:r>
+              <a:rPr lang="en-US" sz="5400" dirty="0">
+                <a:solidFill>
+                  <a:schemeClr val="bg1"/>
+                </a:solidFill>
+                <a:latin typeface="Avenir Medium" panose="02000503020000020003" pitchFamily="2" charset="0"/>
+                <a:ea typeface="Bodoni Ornaments" pitchFamily="2" charset="0"/>
+              </a:rPr>
+              <a:t>Jesus my redeemer</a:t>
+            </a:r>
+          </a:p>
+          <a:p>
+            <a:endParaRPr lang="en-US" sz="5400" dirty="0">
               <a:solidFill>
                 <a:schemeClr val="bg1"/>
               </a:solidFill>
@@ -3199,62 +3239,26 @@
           </a:p>
           <a:p>
             <a:r>
-              <a:rPr lang="en-US" sz="4000" dirty="0">
+              <a:rPr lang="en-US" sz="5400" dirty="0">
                 <a:solidFill>
                   <a:schemeClr val="bg1"/>
                 </a:solidFill>
                 <a:latin typeface="Avenir Medium" panose="02000503020000020003" pitchFamily="2" charset="0"/>
                 <a:ea typeface="Bodoni Ornaments" pitchFamily="2" charset="0"/>
               </a:rPr>
-              <a:t>Take my life and let it be </a:t>
-            </a:r>
-          </a:p>
-          <a:p>
-            <a:r>
-              <a:rPr lang="en-US" sz="4000" dirty="0">
+              <a:t>There is no more for </a:t>
+            </a:r>
+          </a:p>
+          <a:p>
+            <a:r>
+              <a:rPr lang="en-US" sz="5400" dirty="0">
                 <a:solidFill>
                   <a:schemeClr val="bg1"/>
                 </a:solidFill>
                 <a:latin typeface="Avenir Medium" panose="02000503020000020003" pitchFamily="2" charset="0"/>
                 <a:ea typeface="Bodoni Ornaments" pitchFamily="2" charset="0"/>
               </a:rPr>
-              <a:t>Consecrated, Lord, to Thee.</a:t>
-            </a:r>
-          </a:p>
-          <a:p>
-            <a:r>
-              <a:rPr lang="en-US" sz="4000" dirty="0">
-                <a:solidFill>
-                  <a:schemeClr val="bg1"/>
-                </a:solidFill>
-                <a:latin typeface="Avenir Medium" panose="02000503020000020003" pitchFamily="2" charset="0"/>
-                <a:ea typeface="Bodoni Ornaments" pitchFamily="2" charset="0"/>
-              </a:rPr>
-              <a:t>Take my moments and my days, </a:t>
-            </a:r>
-          </a:p>
-          <a:p>
-            <a:r>
-              <a:rPr lang="en-US" sz="4000" dirty="0">
-                <a:solidFill>
-                  <a:schemeClr val="bg1"/>
-                </a:solidFill>
-                <a:latin typeface="Avenir Medium" panose="02000503020000020003" pitchFamily="2" charset="0"/>
-                <a:ea typeface="Bodoni Ornaments" pitchFamily="2" charset="0"/>
-              </a:rPr>
-              <a:t>Let them flow in ceaseless praise.</a:t>
-            </a:r>
-          </a:p>
-          <a:p>
-            <a:r>
-              <a:rPr lang="en-US" sz="4000" dirty="0">
-                <a:solidFill>
-                  <a:schemeClr val="bg1"/>
-                </a:solidFill>
-                <a:latin typeface="Avenir Medium" panose="02000503020000020003" pitchFamily="2" charset="0"/>
-                <a:ea typeface="Bodoni Ornaments" pitchFamily="2" charset="0"/>
-              </a:rPr>
-              <a:t>Let them flow in ceaseless praise</a:t>
+              <a:t>heaven now to give</a:t>
             </a:r>
           </a:p>
         </p:txBody>
